--- a/it/slides/04-Architettura_dei_Calcolatori-Informazione_Digitale-Lab.pptx
+++ b/it/slides/04-Architettura_dei_Calcolatori-Informazione_Digitale-Lab.pptx
@@ -119,30 +119,30 @@
   <p:extLst>
     <p:ext uri="{521415D9-36F7-43E2-AB2F-B90AF26B5E84}">
       <p14:sectionLst xmlns:p14="http://schemas.microsoft.com/office/powerpoint/2010/main">
-        <p14:section name="Apertura" id="{3a680bc2-d7e8-f794-86b4-ed94e7a59265}">
+        <p14:section name="Apertura" id="{e3e8cb7f-42e6-7233-361d-88d8a309c495}">
           <p14:sldIdLst>
             <p14:sldId id="256"/>
             <p14:sldId id="257"/>
           </p14:sldIdLst>
         </p14:section>
-        <p14:section name="Strutture dati" id="{392771bb-f502-2b1b-5f06-76db4273bed0}">
+        <p14:section name="Strutture dati" id="{9aa31b9d-ad6f-5f40-7160-04113b3e037c}">
           <p14:sldIdLst>
             <p14:sldId id="258"/>
           </p14:sldIdLst>
         </p14:section>
-        <p14:section name="Dati e algoritmi" id="{160ac09a-abd6-c208-d04e-6df3143a3d84}">
+        <p14:section name="Dati e algoritmi" id="{4ebbf8f3-df27-f983-e6c7-2e6445467fdf}">
           <p14:sldIdLst>
             <p14:sldId id="259"/>
           </p14:sldIdLst>
         </p14:section>
-        <p14:section name="Il programma completo" id="{37d0904b-4bdd-d036-51e4-19891c261111}">
+        <p14:section name="Il programma completo" id="{fc691a7a-c562-d3c0-89c8-e83b0c6051fa}">
           <p14:sldIdLst>
             <p14:sldId id="260"/>
             <p14:sldId id="261"/>
             <p14:sldId id="262"/>
           </p14:sldIdLst>
         </p14:section>
-        <p14:section name="Eseguire e provare" id="{94d9afcc-f2ed-5d37-85ab-9cd0da5a81ab}">
+        <p14:section name="Eseguire e provare" id="{4508f1f8-b64f-8dc2-edae-f74b3be70018}">
           <p14:sldIdLst>
             <p14:sldId id="263"/>
             <p14:sldId id="264"/>
@@ -151,7 +151,7 @@
             <p14:sldId id="267"/>
           </p14:sldIdLst>
         </p14:section>
-        <p14:section name="Esercizi" id="{58597be6-7517-36f8-5a83-15acb9be9754}">
+        <p14:section name="Esercizi" id="{7552829a-d712-4b3e-f07d-6f83f31cde2f}">
           <p14:sldIdLst>
             <p14:sldId id="268"/>
           </p14:sldIdLst>

--- a/it/slides/04-Architettura_dei_Calcolatori-Informazione_Digitale-Lab.pptx
+++ b/it/slides/04-Architettura_dei_Calcolatori-Informazione_Digitale-Lab.pptx
@@ -119,30 +119,30 @@
   <p:extLst>
     <p:ext uri="{521415D9-36F7-43E2-AB2F-B90AF26B5E84}">
       <p14:sectionLst xmlns:p14="http://schemas.microsoft.com/office/powerpoint/2010/main">
-        <p14:section name="Apertura" id="{e3e8cb7f-42e6-7233-361d-88d8a309c495}">
+        <p14:section name="Apertura" id="{620ec307-51ab-a2bd-d51f-488a3d46c5e8}">
           <p14:sldIdLst>
             <p14:sldId id="256"/>
             <p14:sldId id="257"/>
           </p14:sldIdLst>
         </p14:section>
-        <p14:section name="Strutture dati" id="{9aa31b9d-ad6f-5f40-7160-04113b3e037c}">
+        <p14:section name="Strutture dati" id="{a37b036f-e123-64ea-941f-7670abd8d774}">
           <p14:sldIdLst>
             <p14:sldId id="258"/>
           </p14:sldIdLst>
         </p14:section>
-        <p14:section name="Dati e algoritmi" id="{4ebbf8f3-df27-f983-e6c7-2e6445467fdf}">
+        <p14:section name="Dati e algoritmi" id="{f2818daf-3744-d166-04d3-300792ca54de}">
           <p14:sldIdLst>
             <p14:sldId id="259"/>
           </p14:sldIdLst>
         </p14:section>
-        <p14:section name="Il programma completo" id="{fc691a7a-c562-d3c0-89c8-e83b0c6051fa}">
+        <p14:section name="Il programma completo" id="{e585597f-b227-61a1-d25f-1d09b46a5baf}">
           <p14:sldIdLst>
             <p14:sldId id="260"/>
             <p14:sldId id="261"/>
             <p14:sldId id="262"/>
           </p14:sldIdLst>
         </p14:section>
-        <p14:section name="Eseguire e provare" id="{4508f1f8-b64f-8dc2-edae-f74b3be70018}">
+        <p14:section name="Eseguire e provare" id="{cc89ee16-0e65-47cc-268d-6ecd44566501}">
           <p14:sldIdLst>
             <p14:sldId id="263"/>
             <p14:sldId id="264"/>
@@ -151,7 +151,7 @@
             <p14:sldId id="267"/>
           </p14:sldIdLst>
         </p14:section>
-        <p14:section name="Esercizi" id="{7552829a-d712-4b3e-f07d-6f83f31cde2f}">
+        <p14:section name="Esercizi" id="{92a7a534-a082-5699-c2ca-fdd14f7d768d}">
           <p14:sldIdLst>
             <p14:sldId id="268"/>
           </p14:sldIdLst>
@@ -562,7 +562,9 @@
               <a:rPr lang="en-US" dirty="0"/>
               <a:t>Questa è la presentazione del codice della Lezione 04. Mentre la presentazione della lezione sviluppa i concetti, questa raccoglie tutto ciò che si scrive e si esegue: ogni listato con il suo commento, il programma completo della lezione, il risultato che deve produrre, e la procedura per provarlo su ciascuno dei tre host. Le due presentazioni vanno lette insieme: i concetti spiegano il codice, e il codice dà ai concetti una conseguenza osservabile.
 Stato di apprendimento: DA COMPRENDERE OGGI, alla fine di questa lezione lo spiegate, lo seguite passo passo e lo applicate da soli; DA UTILIZZARE OGGI, oggi seguite e usate la ricetta; come funziona dentro si spiega più avanti, o non fa parte del corso; DA COMPRENDERE PIÙ AVANTI, riconoscete il nome e lo scopo; lo spiega una lezione successiva. Una slide senza etichetta è contesto: una storia, un esempio, una domanda, un esercizio.
-Stato di apprendimento di questa lezione. DA COMPRENDERE OGGI: analogico e digitale; bit, byte, parola; l'esadecimale; la notazione posizionale; un colore è un numero; caratteri e stringhe; l'ordine little-endian; le strutture dati; gli array in memoria; gli algoritmi. DA UTILIZZARE OGGI: shift come moltiplicazione (Lezione 05) e, usati senza essere studiati nel corso, il programma completo, gli strumenti di PRG32. DA COMPRENDERE PIÙ AVANTI: niente. Una slide senza etichetta è contesto: una storia, un esempio, una domanda, un esercizio.</a:t>
+Stato di apprendimento di questa lezione. DA COMPRENDERE OGGI: analogico e digitale; bit, byte, parola; l'esadecimale; la notazione posizionale; un colore è un numero; caratteri e stringhe; l'ordine little-endian; le strutture dati; gli array in memoria; gli algoritmi. DA UTILIZZARE OGGI: shift come moltiplicazione (Lezione 05) e, usati senza essere studiati nel corso, il programma completo, gli strumenti di PRG32. DA COMPRENDERE PIÙ AVANTI: niente. Una slide senza etichetta è contesto: una storia, un esempio, una domanda, un esercizio.
+Percorso. I risultati di oggi: (1) distinguere l'informazione analogica da quella digitale e contare i valori che n bit possono rappresentare; (2) codificare numeri, colori e testo in bit: notazione posizionale, esadecimale, RGB565, ASCII; (3) nominare le strutture dati di base e le proprietà di un algoritmo. Si appoggia su: solo ciò che ha preparato la Lezione 01. Prossimo passo: Lezione 05, Rappresentazione dei numeri: gli interi.
+Ponte. Nella Lezione 02 l'istruzione addi t1, t1, 1 è comparsa in memoria come la parola 0x00130313. Oggi gli stessi 32 bit si possono leggere come numero, colore, quattro lettere o istruzione: decide il codice. La Lezione 19 legge l'istruzione campo per campo. Richiamo: Nominate due cose diverse che una parola di 32 bit può significare, e che cosa decide quale significato vale.</a:t>
             </a:r>
             <a:endParaRPr lang="en-US" dirty="0"/>
           </a:p>
